--- a/presentations/03-rag-with-spring-ai.pptx
+++ b/presentations/03-rag-with-spring-ai.pptx
@@ -3579,45 +3579,6 @@
           </a:p>
         </p:txBody>
       </p:sp>
-      <p:sp>
-        <p:nvSpPr>
-          <p:cNvPr id="15" name="Text 13"/>
-          <p:cNvSpPr/>
-          <p:nvPr/>
-        </p:nvSpPr>
-        <p:spPr>
-          <a:xfrm>
-            <a:off x="548640" y="5815584"/>
-            <a:ext cx="11064240" cy="448056"/>
-          </a:xfrm>
-          <a:prstGeom prst="rect">
-            <a:avLst/>
-          </a:prstGeom>
-          <a:noFill/>
-          <a:ln/>
-        </p:spPr>
-        <p:txBody>
-          <a:bodyPr wrap="square" lIns="0" tIns="0" rIns="0" bIns="0" rtlCol="0" anchor="t"/>
-          <a:lstStyle/>
-          <a:p>
-            <a:pPr marL="0" indent="0">
-              <a:buNone/>
-            </a:pPr>
-            <a:r>
-              <a:rPr lang="en-US" sz="1800" b="1" dirty="0">
-                <a:solidFill>
-                  <a:srgbClr val="397C25"/>
-                </a:solidFill>
-                <a:latin typeface="Calibri" pitchFamily="34" charset="0"/>
-                <a:ea typeface="Calibri" pitchFamily="34" charset="-122"/>
-                <a:cs typeface="Calibri" pitchFamily="34" charset="-120"/>
-              </a:rPr>
-              <a:t>Depend on VectorStore so a persistent implementation can replace SimpleVectorStore.</a:t>
-            </a:r>
-            <a:endParaRPr lang="en-US" sz="1800" dirty="0"/>
-          </a:p>
-        </p:txBody>
-      </p:sp>
     </p:spTree>
   </p:cSld>
   <p:clrMapOvr>
@@ -4415,45 +4376,6 @@
           </a:p>
         </p:txBody>
       </p:sp>
-      <p:sp>
-        <p:nvSpPr>
-          <p:cNvPr id="25" name="Text 19"/>
-          <p:cNvSpPr/>
-          <p:nvPr/>
-        </p:nvSpPr>
-        <p:spPr>
-          <a:xfrm>
-            <a:off x="548640" y="5815584"/>
-            <a:ext cx="11064240" cy="448056"/>
-          </a:xfrm>
-          <a:prstGeom prst="rect">
-            <a:avLst/>
-          </a:prstGeom>
-          <a:noFill/>
-          <a:ln/>
-        </p:spPr>
-        <p:txBody>
-          <a:bodyPr wrap="square" lIns="0" tIns="0" rIns="0" bIns="0" rtlCol="0" anchor="t"/>
-          <a:lstStyle/>
-          <a:p>
-            <a:pPr marL="0" indent="0">
-              <a:buNone/>
-            </a:pPr>
-            <a:r>
-              <a:rPr lang="en-US" sz="1800" b="1" dirty="0">
-                <a:solidFill>
-                  <a:srgbClr val="397C25"/>
-                </a:solidFill>
-                <a:latin typeface="Calibri" pitchFamily="34" charset="0"/>
-                <a:ea typeface="Calibri" pitchFamily="34" charset="-122"/>
-                <a:cs typeface="Calibri" pitchFamily="34" charset="-120"/>
-              </a:rPr>
-              <a:t>The scores and passage are illustrative. Similar meaning can match different words; it is not proof of truth.</a:t>
-            </a:r>
-            <a:endParaRPr lang="en-US" sz="1800" dirty="0"/>
-          </a:p>
-        </p:txBody>
-      </p:sp>
     </p:spTree>
   </p:cSld>
   <p:clrMapOvr>
@@ -4901,45 +4823,6 @@
           </a:p>
         </p:txBody>
       </p:sp>
-      <p:sp>
-        <p:nvSpPr>
-          <p:cNvPr id="13" name="Text 10"/>
-          <p:cNvSpPr/>
-          <p:nvPr/>
-        </p:nvSpPr>
-        <p:spPr>
-          <a:xfrm>
-            <a:off x="548640" y="5815584"/>
-            <a:ext cx="11064240" cy="448056"/>
-          </a:xfrm>
-          <a:prstGeom prst="rect">
-            <a:avLst/>
-          </a:prstGeom>
-          <a:noFill/>
-          <a:ln/>
-        </p:spPr>
-        <p:txBody>
-          <a:bodyPr wrap="square" lIns="0" tIns="0" rIns="0" bIns="0" rtlCol="0" anchor="t"/>
-          <a:lstStyle/>
-          <a:p>
-            <a:pPr marL="0" indent="0">
-              <a:buNone/>
-            </a:pPr>
-            <a:r>
-              <a:rPr lang="en-US" sz="1800" b="1" dirty="0">
-                <a:solidFill>
-                  <a:srgbClr val="397C25"/>
-                </a:solidFill>
-                <a:latin typeface="Calibri" pitchFamily="34" charset="0"/>
-                <a:ea typeface="Calibri" pitchFamily="34" charset="-122"/>
-                <a:cs typeface="Calibri" pitchFamily="34" charset="-120"/>
-              </a:rPr>
-              <a:t>The image is an illustrative aligned example. Similarity is not answer confidence.</a:t>
-            </a:r>
-            <a:endParaRPr lang="en-US" sz="1800" dirty="0"/>
-          </a:p>
-        </p:txBody>
-      </p:sp>
     </p:spTree>
   </p:cSld>
   <p:clrMapOvr>
@@ -5627,45 +5510,6 @@
           </a:p>
         </p:txBody>
       </p:sp>
-      <p:sp>
-        <p:nvSpPr>
-          <p:cNvPr id="15" name="Text 13"/>
-          <p:cNvSpPr/>
-          <p:nvPr/>
-        </p:nvSpPr>
-        <p:spPr>
-          <a:xfrm>
-            <a:off x="548640" y="5815584"/>
-            <a:ext cx="11064240" cy="448056"/>
-          </a:xfrm>
-          <a:prstGeom prst="rect">
-            <a:avLst/>
-          </a:prstGeom>
-          <a:noFill/>
-          <a:ln/>
-        </p:spPr>
-        <p:txBody>
-          <a:bodyPr wrap="square" lIns="0" tIns="0" rIns="0" bIns="0" rtlCol="0" anchor="t"/>
-          <a:lstStyle/>
-          <a:p>
-            <a:pPr marL="0" indent="0">
-              <a:buNone/>
-            </a:pPr>
-            <a:r>
-              <a:rPr lang="en-US" sz="1800" b="1" dirty="0">
-                <a:solidFill>
-                  <a:srgbClr val="397C25"/>
-                </a:solidFill>
-                <a:latin typeface="Calibri" pitchFamily="34" charset="0"/>
-                <a:ea typeface="Calibri" pitchFamily="34" charset="-122"/>
-                <a:cs typeface="Calibri" pitchFamily="34" charset="-120"/>
-              </a:rPr>
-              <a:t>The actual services share RagSearchProperties so their retrieval settings stay aligned.</a:t>
-            </a:r>
-            <a:endParaRPr lang="en-US" sz="1800" dirty="0"/>
-          </a:p>
-        </p:txBody>
-      </p:sp>
     </p:spTree>
   </p:cSld>
   <p:clrMapOvr>
@@ -6736,45 +6580,6 @@
           </a:p>
         </p:txBody>
       </p:sp>
-      <p:sp>
-        <p:nvSpPr>
-          <p:cNvPr id="31" name="Text 28"/>
-          <p:cNvSpPr/>
-          <p:nvPr/>
-        </p:nvSpPr>
-        <p:spPr>
-          <a:xfrm>
-            <a:off x="548640" y="5815584"/>
-            <a:ext cx="11064240" cy="448056"/>
-          </a:xfrm>
-          <a:prstGeom prst="rect">
-            <a:avLst/>
-          </a:prstGeom>
-          <a:noFill/>
-          <a:ln/>
-        </p:spPr>
-        <p:txBody>
-          <a:bodyPr wrap="square" lIns="0" tIns="0" rIns="0" bIns="0" rtlCol="0" anchor="t"/>
-          <a:lstStyle/>
-          <a:p>
-            <a:pPr marL="0" indent="0">
-              <a:buNone/>
-            </a:pPr>
-            <a:r>
-              <a:rPr lang="en-US" sz="1800" b="1" dirty="0">
-                <a:solidFill>
-                  <a:srgbClr val="397C25"/>
-                </a:solidFill>
-                <a:latin typeface="Calibri" pitchFamily="34" charset="0"/>
-                <a:ea typeface="Calibri" pitchFamily="34" charset="-122"/>
-                <a:cs typeface="Calibri" pitchFamily="34" charset="-120"/>
-              </a:rPr>
-              <a:t>This service returns sources separately; it does not construct numbered citations inside model text.</a:t>
-            </a:r>
-            <a:endParaRPr lang="en-US" sz="1800" dirty="0"/>
-          </a:p>
-        </p:txBody>
-      </p:sp>
     </p:spTree>
   </p:cSld>
   <p:clrMapOvr>
@@ -7462,45 +7267,6 @@
           </a:p>
         </p:txBody>
       </p:sp>
-      <p:sp>
-        <p:nvSpPr>
-          <p:cNvPr id="15" name="Text 13"/>
-          <p:cNvSpPr/>
-          <p:nvPr/>
-        </p:nvSpPr>
-        <p:spPr>
-          <a:xfrm>
-            <a:off x="548640" y="5815584"/>
-            <a:ext cx="11064240" cy="448056"/>
-          </a:xfrm>
-          <a:prstGeom prst="rect">
-            <a:avLst/>
-          </a:prstGeom>
-          <a:noFill/>
-          <a:ln/>
-        </p:spPr>
-        <p:txBody>
-          <a:bodyPr wrap="square" lIns="0" tIns="0" rIns="0" bIns="0" rtlCol="0" anchor="t"/>
-          <a:lstStyle/>
-          <a:p>
-            <a:pPr marL="0" indent="0">
-              <a:buNone/>
-            </a:pPr>
-            <a:r>
-              <a:rPr lang="en-US" sz="1800" b="1" dirty="0">
-                <a:solidFill>
-                  <a:srgbClr val="397C25"/>
-                </a:solidFill>
-                <a:latin typeface="Calibri" pitchFamily="34" charset="0"/>
-                <a:ea typeface="Calibri" pitchFamily="34" charset="-122"/>
-                <a:cs typeface="Calibri" pitchFamily="34" charset="-120"/>
-              </a:rPr>
-              <a:t>No matches: the native path returns a fallback without calling the chat model.</a:t>
-            </a:r>
-            <a:endParaRPr lang="en-US" sz="1800" dirty="0"/>
-          </a:p>
-        </p:txBody>
-      </p:sp>
     </p:spTree>
   </p:cSld>
   <p:clrMapOvr>
@@ -8228,45 +7994,6 @@
           </a:p>
         </p:txBody>
       </p:sp>
-      <p:sp>
-        <p:nvSpPr>
-          <p:cNvPr id="15" name="Text 13"/>
-          <p:cNvSpPr/>
-          <p:nvPr/>
-        </p:nvSpPr>
-        <p:spPr>
-          <a:xfrm>
-            <a:off x="548640" y="5815584"/>
-            <a:ext cx="11064240" cy="448056"/>
-          </a:xfrm>
-          <a:prstGeom prst="rect">
-            <a:avLst/>
-          </a:prstGeom>
-          <a:noFill/>
-          <a:ln/>
-        </p:spPr>
-        <p:txBody>
-          <a:bodyPr wrap="square" lIns="0" tIns="0" rIns="0" bIns="0" rtlCol="0" anchor="t"/>
-          <a:lstStyle/>
-          <a:p>
-            <a:pPr marL="0" indent="0">
-              <a:buNone/>
-            </a:pPr>
-            <a:r>
-              <a:rPr lang="en-US" sz="1800" b="1" dirty="0">
-                <a:solidFill>
-                  <a:srgbClr val="397C25"/>
-                </a:solidFill>
-                <a:latin typeface="Calibri" pitchFamily="34" charset="0"/>
-                <a:ea typeface="Calibri" pitchFamily="34" charset="-122"/>
-                <a:cs typeface="Calibri" pitchFamily="34" charset="-120"/>
-              </a:rPr>
-              <a:t>The advisor reduces query plumbing; ingestion and application guardrails still matter.</a:t>
-            </a:r>
-            <a:endParaRPr lang="en-US" sz="1800" dirty="0"/>
-          </a:p>
-        </p:txBody>
-      </p:sp>
     </p:spTree>
   </p:cSld>
   <p:clrMapOvr>
@@ -8914,45 +8641,6 @@
           </a:p>
         </p:txBody>
       </p:sp>
-      <p:sp>
-        <p:nvSpPr>
-          <p:cNvPr id="18" name="Text 16"/>
-          <p:cNvSpPr/>
-          <p:nvPr/>
-        </p:nvSpPr>
-        <p:spPr>
-          <a:xfrm>
-            <a:off x="548640" y="5815584"/>
-            <a:ext cx="11064240" cy="448056"/>
-          </a:xfrm>
-          <a:prstGeom prst="rect">
-            <a:avLst/>
-          </a:prstGeom>
-          <a:noFill/>
-          <a:ln/>
-        </p:spPr>
-        <p:txBody>
-          <a:bodyPr wrap="square" lIns="0" tIns="0" rIns="0" bIns="0" rtlCol="0" anchor="t"/>
-          <a:lstStyle/>
-          <a:p>
-            <a:pPr marL="0" indent="0">
-              <a:buNone/>
-            </a:pPr>
-            <a:r>
-              <a:rPr lang="en-US" sz="1800" b="1" dirty="0">
-                <a:solidFill>
-                  <a:srgbClr val="397C25"/>
-                </a:solidFill>
-                <a:latin typeface="Calibri" pitchFamily="34" charset="0"/>
-                <a:ea typeface="Calibri" pitchFamily="34" charset="-122"/>
-                <a:cs typeface="Calibri" pitchFamily="34" charset="-120"/>
-              </a:rPr>
-              <a:t>Send JSON to either route: {"question":"What is Spring AI?"}. The browser UI uses the advisor route.</a:t>
-            </a:r>
-            <a:endParaRPr lang="en-US" sz="1800" dirty="0"/>
-          </a:p>
-        </p:txBody>
-      </p:sp>
     </p:spTree>
   </p:cSld>
   <p:clrMapOvr>
@@ -9268,45 +8956,6 @@
           </a:p>
         </p:txBody>
       </p:sp>
-      <p:sp>
-        <p:nvSpPr>
-          <p:cNvPr id="10" name="Text 6"/>
-          <p:cNvSpPr/>
-          <p:nvPr/>
-        </p:nvSpPr>
-        <p:spPr>
-          <a:xfrm>
-            <a:off x="548640" y="5815584"/>
-            <a:ext cx="11064240" cy="448056"/>
-          </a:xfrm>
-          <a:prstGeom prst="rect">
-            <a:avLst/>
-          </a:prstGeom>
-          <a:noFill/>
-          <a:ln/>
-        </p:spPr>
-        <p:txBody>
-          <a:bodyPr wrap="square" lIns="0" tIns="0" rIns="0" bIns="0" rtlCol="0" anchor="t"/>
-          <a:lstStyle/>
-          <a:p>
-            <a:pPr marL="0" indent="0">
-              <a:buNone/>
-            </a:pPr>
-            <a:r>
-              <a:rPr lang="en-US" sz="1800" b="1" dirty="0">
-                <a:solidFill>
-                  <a:srgbClr val="397C25"/>
-                </a:solidFill>
-                <a:latin typeface="Calibri" pitchFamily="34" charset="0"/>
-                <a:ea typeface="Calibri" pitchFamily="34" charset="-122"/>
-                <a:cs typeface="Calibri" pitchFamily="34" charset="-120"/>
-              </a:rPr>
-              <a:t>Two excerpts from the same historical source card: compare its passage with the earlier answer.</a:t>
-            </a:r>
-            <a:endParaRPr lang="en-US" sz="1800" dirty="0"/>
-          </a:p>
-        </p:txBody>
-      </p:sp>
     </p:spTree>
   </p:cSld>
   <p:clrMapOvr>
@@ -9754,45 +9403,6 @@
           </a:p>
         </p:txBody>
       </p:sp>
-      <p:sp>
-        <p:nvSpPr>
-          <p:cNvPr id="13" name="Text 10"/>
-          <p:cNvSpPr/>
-          <p:nvPr/>
-        </p:nvSpPr>
-        <p:spPr>
-          <a:xfrm>
-            <a:off x="548640" y="5815584"/>
-            <a:ext cx="11064240" cy="448056"/>
-          </a:xfrm>
-          <a:prstGeom prst="rect">
-            <a:avLst/>
-          </a:prstGeom>
-          <a:noFill/>
-          <a:ln/>
-        </p:spPr>
-        <p:txBody>
-          <a:bodyPr wrap="square" lIns="0" tIns="0" rIns="0" bIns="0" rtlCol="0" anchor="t"/>
-          <a:lstStyle/>
-          <a:p>
-            <a:pPr marL="0" indent="0">
-              <a:buNone/>
-            </a:pPr>
-            <a:r>
-              <a:rPr lang="en-US" sz="1800" b="1" dirty="0">
-                <a:solidFill>
-                  <a:srgbClr val="397C25"/>
-                </a:solidFill>
-                <a:latin typeface="Calibri" pitchFamily="34" charset="0"/>
-                <a:ea typeface="Calibri" pitchFamily="34" charset="-122"/>
-                <a:cs typeface="Calibri" pitchFamily="34" charset="-120"/>
-              </a:rPr>
-              <a:t>Evaluate facts, paraphrases, ambiguous questions, and questions absent from the corpus.</a:t>
-            </a:r>
-            <a:endParaRPr lang="en-US" sz="1800" dirty="0"/>
-          </a:p>
-        </p:txBody>
-      </p:sp>
     </p:spTree>
   </p:cSld>
   <p:clrMapOvr>
@@ -10695,45 +10305,6 @@
           </a:p>
         </p:txBody>
       </p:sp>
-      <p:sp>
-        <p:nvSpPr>
-          <p:cNvPr id="26" name="Text 23"/>
-          <p:cNvSpPr/>
-          <p:nvPr/>
-        </p:nvSpPr>
-        <p:spPr>
-          <a:xfrm>
-            <a:off x="548640" y="5815584"/>
-            <a:ext cx="11064240" cy="448056"/>
-          </a:xfrm>
-          <a:prstGeom prst="rect">
-            <a:avLst/>
-          </a:prstGeom>
-          <a:noFill/>
-          <a:ln/>
-        </p:spPr>
-        <p:txBody>
-          <a:bodyPr wrap="square" lIns="0" tIns="0" rIns="0" bIns="0" rtlCol="0" anchor="t"/>
-          <a:lstStyle/>
-          <a:p>
-            <a:pPr marL="0" indent="0">
-              <a:buNone/>
-            </a:pPr>
-            <a:r>
-              <a:rPr lang="en-US" sz="1800" b="1" dirty="0">
-                <a:solidFill>
-                  <a:srgbClr val="397C25"/>
-                </a:solidFill>
-                <a:latin typeface="Calibri" pitchFamily="34" charset="0"/>
-                <a:ea typeface="Calibri" pitchFamily="34" charset="-122"/>
-                <a:cs typeface="Calibri" pitchFamily="34" charset="-120"/>
-              </a:rPr>
-              <a:t>RAG supplies context from your corpus; it does not guarantee a correct answer.</a:t>
-            </a:r>
-            <a:endParaRPr lang="en-US" sz="1800" dirty="0"/>
-          </a:p>
-        </p:txBody>
-      </p:sp>
     </p:spTree>
   </p:cSld>
   <p:clrMapOvr>
@@ -11381,45 +10952,6 @@
           </a:p>
         </p:txBody>
       </p:sp>
-      <p:sp>
-        <p:nvSpPr>
-          <p:cNvPr id="18" name="Text 16"/>
-          <p:cNvSpPr/>
-          <p:nvPr/>
-        </p:nvSpPr>
-        <p:spPr>
-          <a:xfrm>
-            <a:off x="548640" y="5815584"/>
-            <a:ext cx="11064240" cy="448056"/>
-          </a:xfrm>
-          <a:prstGeom prst="rect">
-            <a:avLst/>
-          </a:prstGeom>
-          <a:noFill/>
-          <a:ln/>
-        </p:spPr>
-        <p:txBody>
-          <a:bodyPr wrap="square" lIns="0" tIns="0" rIns="0" bIns="0" rtlCol="0" anchor="t"/>
-          <a:lstStyle/>
-          <a:p>
-            <a:pPr marL="0" indent="0">
-              <a:buNone/>
-            </a:pPr>
-            <a:r>
-              <a:rPr lang="en-US" sz="1800" b="1" dirty="0">
-                <a:solidFill>
-                  <a:srgbClr val="397C25"/>
-                </a:solidFill>
-                <a:latin typeface="Calibri" pitchFamily="34" charset="0"/>
-                <a:ea typeface="Calibri" pitchFamily="34" charset="-122"/>
-                <a:cs typeface="Calibri" pitchFamily="34" charset="-120"/>
-              </a:rPr>
-              <a:t>Top-K and chunk size help control context; neither guarantees the full request fits.</a:t>
-            </a:r>
-            <a:endParaRPr lang="en-US" sz="1800" dirty="0"/>
-          </a:p>
-        </p:txBody>
-      </p:sp>
     </p:spTree>
   </p:cSld>
   <p:clrMapOvr>
@@ -12062,45 +11594,6 @@
           </a:p>
         </p:txBody>
       </p:sp>
-      <p:sp>
-        <p:nvSpPr>
-          <p:cNvPr id="18" name="Text 16"/>
-          <p:cNvSpPr/>
-          <p:nvPr/>
-        </p:nvSpPr>
-        <p:spPr>
-          <a:xfrm>
-            <a:off x="548640" y="5815584"/>
-            <a:ext cx="11064240" cy="448056"/>
-          </a:xfrm>
-          <a:prstGeom prst="rect">
-            <a:avLst/>
-          </a:prstGeom>
-          <a:noFill/>
-          <a:ln/>
-        </p:spPr>
-        <p:txBody>
-          <a:bodyPr wrap="square" lIns="0" tIns="0" rIns="0" bIns="0" rtlCol="0" anchor="t"/>
-          <a:lstStyle/>
-          <a:p>
-            <a:pPr marL="0" indent="0">
-              <a:buNone/>
-            </a:pPr>
-            <a:r>
-              <a:rPr lang="en-US" sz="1800" b="1" dirty="0">
-                <a:solidFill>
-                  <a:srgbClr val="397C25"/>
-                </a:solidFill>
-                <a:latin typeface="Calibri" pitchFamily="34" charset="0"/>
-                <a:ea typeface="Calibri" pitchFamily="34" charset="-122"/>
-                <a:cs typeface="Calibri" pitchFamily="34" charset="-120"/>
-              </a:rPr>
-              <a:t>Reuse the Module 01 environment, including the separate embedding deployment.</a:t>
-            </a:r>
-            <a:endParaRPr lang="en-US" sz="1800" dirty="0"/>
-          </a:p>
-        </p:txBody>
-      </p:sp>
     </p:spTree>
   </p:cSld>
   <p:clrMapOvr>
@@ -12175,14 +11668,98 @@
       </p:sp>
       <p:sp>
         <p:nvSpPr>
-          <p:cNvPr id="3" name="Text 1"/>
-          <p:cNvSpPr/>
-          <p:nvPr/>
-        </p:nvSpPr>
-        <p:spPr>
-          <a:xfrm>
-            <a:off x="548640" y="950976"/>
-            <a:ext cx="10972800" cy="1197864"/>
+          <p:cNvPr id="9" name="Text 6"/>
+          <p:cNvSpPr/>
+          <p:nvPr/>
+        </p:nvSpPr>
+        <p:spPr>
+          <a:xfrm>
+            <a:off x="548640" y="6400800"/>
+            <a:ext cx="9875520" cy="210312"/>
+          </a:xfrm>
+          <a:prstGeom prst="rect">
+            <a:avLst/>
+          </a:prstGeom>
+          <a:noFill/>
+          <a:ln/>
+        </p:spPr>
+        <p:txBody>
+          <a:bodyPr wrap="square" lIns="0" tIns="0" rIns="0" bIns="0" rtlCol="0" anchor="t"/>
+          <a:lstStyle/>
+          <a:p>
+            <a:pPr marL="0" indent="0">
+              <a:buNone/>
+            </a:pPr>
+            <a:r>
+              <a:rPr lang="en-US" sz="1050" dirty="0">
+                <a:solidFill>
+                  <a:srgbClr val="B9CBB9"/>
+                </a:solidFill>
+                <a:latin typeface="Calibri" pitchFamily="34" charset="0"/>
+                <a:ea typeface="Calibri" pitchFamily="34" charset="-122"/>
+                <a:cs typeface="Calibri" pitchFamily="34" charset="-120"/>
+              </a:rPr>
+              <a:t>SPRING AI FOR BEGINNERS  /  03 RAG</a:t>
+            </a:r>
+            <a:endParaRPr lang="en-US" sz="1050" dirty="0"/>
+          </a:p>
+        </p:txBody>
+      </p:sp>
+      <p:sp>
+        <p:nvSpPr>
+          <p:cNvPr id="10" name="Text 7"/>
+          <p:cNvSpPr/>
+          <p:nvPr/>
+        </p:nvSpPr>
+        <p:spPr>
+          <a:xfrm>
+            <a:off x="10817352" y="6373368"/>
+            <a:ext cx="822960" cy="256032"/>
+          </a:xfrm>
+          <a:prstGeom prst="rect">
+            <a:avLst/>
+          </a:prstGeom>
+          <a:noFill/>
+          <a:ln/>
+        </p:spPr>
+        <p:txBody>
+          <a:bodyPr wrap="square" lIns="0" tIns="0" rIns="0" bIns="0" rtlCol="0" anchor="t"/>
+          <a:lstStyle/>
+          <a:p>
+            <a:pPr marL="0" indent="0" algn="r">
+              <a:buNone/>
+            </a:pPr>
+            <a:r>
+              <a:rPr lang="en-US" sz="1200" dirty="0">
+                <a:solidFill>
+                  <a:srgbClr val="B9CBB9"/>
+                </a:solidFill>
+                <a:latin typeface="Calibri" pitchFamily="34" charset="0"/>
+                <a:ea typeface="Calibri" pitchFamily="34" charset="-122"/>
+                <a:cs typeface="Calibri" pitchFamily="34" charset="-120"/>
+              </a:rPr>
+              <a:t>22 / 22</a:t>
+            </a:r>
+            <a:endParaRPr lang="en-US" sz="1200" dirty="0"/>
+          </a:p>
+        </p:txBody>
+      </p:sp>
+      <p:sp>
+        <p:nvSpPr>
+          <p:cNvPr id="12" name="Text 1">
+            <a:extLst>
+              <a:ext uri="{FF2B5EF4-FFF2-40B4-BE49-F238E27FC236}">
+                <a16:creationId xmlns:a16="http://schemas.microsoft.com/office/drawing/2014/main" id="{18AF1A4E-A74B-6C25-D07F-E363A140A5B0}"/>
+              </a:ext>
+            </a:extLst>
+          </p:cNvPr>
+          <p:cNvSpPr/>
+          <p:nvPr/>
+        </p:nvSpPr>
+        <p:spPr>
+          <a:xfrm>
+            <a:off x="645232" y="2888731"/>
+            <a:ext cx="1615011" cy="678201"/>
           </a:xfrm>
           <a:prstGeom prst="rect">
             <a:avLst/>
@@ -12206,132 +11783,21 @@
                 <a:ea typeface="Trebuchet MS" pitchFamily="34" charset="-122"/>
                 <a:cs typeface="Trebuchet MS" pitchFamily="34" charset="-120"/>
               </a:rPr>
-              <a:t>Prove that retrieval improves your answers</a:t>
+              <a:t>Demo</a:t>
             </a:r>
             <a:endParaRPr lang="en-US" sz="4000" dirty="0"/>
-          </a:p>
-        </p:txBody>
-      </p:sp>
-      <p:sp>
-        <p:nvSpPr>
-          <p:cNvPr id="4" name="Text 2"/>
-          <p:cNvSpPr/>
-          <p:nvPr/>
-        </p:nvSpPr>
-        <p:spPr>
-          <a:xfrm>
-            <a:off x="548640" y="2423160"/>
-            <a:ext cx="4572000" cy="850392"/>
-          </a:xfrm>
-          <a:prstGeom prst="rect">
-            <a:avLst/>
-          </a:prstGeom>
-          <a:noFill/>
-          <a:ln/>
-        </p:spPr>
-        <p:txBody>
-          <a:bodyPr wrap="square" lIns="0" tIns="0" rIns="0" bIns="0" rtlCol="0" anchor="t"/>
-          <a:lstStyle/>
-          <a:p>
-            <a:pPr marL="0" indent="0">
-              <a:buNone/>
-            </a:pPr>
-            <a:r>
-              <a:rPr lang="en-US" sz="2100" dirty="0">
-                <a:solidFill>
-                  <a:srgbClr val="FFFFFF"/>
-                </a:solidFill>
-                <a:latin typeface="Calibri" pitchFamily="34" charset="0"/>
-                <a:ea typeface="Calibri" pitchFamily="34" charset="-122"/>
-                <a:cs typeface="Calibri" pitchFamily="34" charset="-120"/>
-              </a:rPr>
-              <a:t>Use direct context when a small source fits in the prompt.</a:t>
-            </a:r>
-            <a:endParaRPr lang="en-US" sz="2100" dirty="0"/>
-          </a:p>
-        </p:txBody>
-      </p:sp>
-      <p:sp>
-        <p:nvSpPr>
-          <p:cNvPr id="5" name="Text 3"/>
-          <p:cNvSpPr/>
-          <p:nvPr/>
-        </p:nvSpPr>
-        <p:spPr>
-          <a:xfrm>
-            <a:off x="548640" y="3410712"/>
-            <a:ext cx="4572000" cy="850392"/>
-          </a:xfrm>
-          <a:prstGeom prst="rect">
-            <a:avLst/>
-          </a:prstGeom>
-          <a:noFill/>
-          <a:ln/>
-        </p:spPr>
-        <p:txBody>
-          <a:bodyPr wrap="square" lIns="0" tIns="0" rIns="0" bIns="0" rtlCol="0" anchor="t"/>
-          <a:lstStyle/>
-          <a:p>
-            <a:pPr marL="0" indent="0">
-              <a:buNone/>
-            </a:pPr>
-            <a:r>
-              <a:rPr lang="en-US" sz="2100" dirty="0">
-                <a:solidFill>
-                  <a:srgbClr val="FFFFFF"/>
-                </a:solidFill>
-                <a:latin typeface="Calibri" pitchFamily="34" charset="0"/>
-                <a:ea typeface="Calibri" pitchFamily="34" charset="-122"/>
-                <a:cs typeface="Calibri" pitchFamily="34" charset="-120"/>
-              </a:rPr>
-              <a:t>For a larger corpus, test facts, paraphrases, and missing answers.</a:t>
-            </a:r>
-            <a:endParaRPr lang="en-US" sz="2100" dirty="0"/>
-          </a:p>
-        </p:txBody>
-      </p:sp>
-      <p:sp>
-        <p:nvSpPr>
-          <p:cNvPr id="6" name="Text 4"/>
-          <p:cNvSpPr/>
-          <p:nvPr/>
-        </p:nvSpPr>
-        <p:spPr>
-          <a:xfrm>
-            <a:off x="548640" y="4398264"/>
-            <a:ext cx="4572000" cy="850392"/>
-          </a:xfrm>
-          <a:prstGeom prst="rect">
-            <a:avLst/>
-          </a:prstGeom>
-          <a:noFill/>
-          <a:ln/>
-        </p:spPr>
-        <p:txBody>
-          <a:bodyPr wrap="square" lIns="0" tIns="0" rIns="0" bIns="0" rtlCol="0" anchor="t"/>
-          <a:lstStyle/>
-          <a:p>
-            <a:pPr marL="0" indent="0">
-              <a:buNone/>
-            </a:pPr>
-            <a:r>
-              <a:rPr lang="en-US" sz="2100" dirty="0">
-                <a:solidFill>
-                  <a:srgbClr val="FFFFFF"/>
-                </a:solidFill>
-                <a:latin typeface="Calibri" pitchFamily="34" charset="0"/>
-                <a:ea typeface="Calibri" pitchFamily="34" charset="-122"/>
-                <a:cs typeface="Calibri" pitchFamily="34" charset="-120"/>
-              </a:rPr>
-              <a:t>Tune chunks and thresholds against the retrieved evidence.</a:t>
-            </a:r>
-            <a:endParaRPr lang="en-US" sz="2100" dirty="0"/>
           </a:p>
         </p:txBody>
       </p:sp>
       <p:pic>
         <p:nvPicPr>
-          <p:cNvPr id="7" name="Image 0" descr="rag query results"/>
+          <p:cNvPr id="14" name="Picture 13" descr="QR Code">
+            <a:extLst>
+              <a:ext uri="{FF2B5EF4-FFF2-40B4-BE49-F238E27FC236}">
+                <a16:creationId xmlns:a16="http://schemas.microsoft.com/office/drawing/2014/main" id="{6AA91D93-CA54-04B8-8B21-AD35A635C330}"/>
+              </a:ext>
+            </a:extLst>
+          </p:cNvPr>
           <p:cNvPicPr>
             <a:picLocks noChangeAspect="1"/>
           </p:cNvPicPr>
@@ -12345,8 +11811,8 @@
         </p:blipFill>
         <p:spPr>
           <a:xfrm>
-            <a:off x="5486400" y="3437307"/>
-            <a:ext cx="6153912" cy="1044091"/>
+            <a:off x="3574694" y="675763"/>
+            <a:ext cx="5143500" cy="5143500"/>
           </a:xfrm>
           <a:prstGeom prst="rect">
             <a:avLst/>
@@ -12355,118 +11821,40 @@
       </p:pic>
       <p:sp>
         <p:nvSpPr>
-          <p:cNvPr id="8" name="Text 5"/>
-          <p:cNvSpPr/>
-          <p:nvPr/>
-        </p:nvSpPr>
-        <p:spPr>
-          <a:xfrm>
-            <a:off x="548640" y="5815584"/>
-            <a:ext cx="11064240" cy="448056"/>
-          </a:xfrm>
-          <a:prstGeom prst="rect">
-            <a:avLst/>
-          </a:prstGeom>
-          <a:noFill/>
-          <a:ln/>
-        </p:spPr>
-        <p:txBody>
-          <a:bodyPr wrap="square" lIns="0" tIns="0" rIns="0" bIns="0" rtlCol="0" anchor="t"/>
-          <a:lstStyle/>
-          <a:p>
-            <a:pPr marL="0" indent="0">
-              <a:buNone/>
-            </a:pPr>
-            <a:r>
-              <a:rPr lang="en-US" sz="1800" b="1" dirty="0">
-                <a:solidFill>
-                  <a:srgbClr val="86CF54"/>
-                </a:solidFill>
-                <a:latin typeface="Calibri" pitchFamily="34" charset="0"/>
-                <a:ea typeface="Calibri" pitchFamily="34" charset="-122"/>
-                <a:cs typeface="Calibri" pitchFamily="34" charset="-120"/>
-              </a:rPr>
-              <a:t>Next: connect Spring AI to actions and calculations with tools.</a:t>
-            </a:r>
-            <a:endParaRPr lang="en-US" sz="1800" dirty="0"/>
-          </a:p>
-        </p:txBody>
-      </p:sp>
-      <p:sp>
-        <p:nvSpPr>
-          <p:cNvPr id="9" name="Text 6"/>
-          <p:cNvSpPr/>
-          <p:nvPr/>
-        </p:nvSpPr>
-        <p:spPr>
-          <a:xfrm>
-            <a:off x="548640" y="6400800"/>
-            <a:ext cx="9875520" cy="210312"/>
-          </a:xfrm>
-          <a:prstGeom prst="rect">
-            <a:avLst/>
-          </a:prstGeom>
-          <a:noFill/>
-          <a:ln/>
-        </p:spPr>
-        <p:txBody>
-          <a:bodyPr wrap="square" lIns="0" tIns="0" rIns="0" bIns="0" rtlCol="0" anchor="t"/>
-          <a:lstStyle/>
-          <a:p>
-            <a:pPr marL="0" indent="0">
-              <a:buNone/>
-            </a:pPr>
-            <a:r>
-              <a:rPr lang="en-US" sz="1050" dirty="0">
-                <a:solidFill>
-                  <a:srgbClr val="B9CBB9"/>
-                </a:solidFill>
-                <a:latin typeface="Calibri" pitchFamily="34" charset="0"/>
-                <a:ea typeface="Calibri" pitchFamily="34" charset="-122"/>
-                <a:cs typeface="Calibri" pitchFamily="34" charset="-120"/>
-              </a:rPr>
-              <a:t>SPRING AI FOR BEGINNERS  /  03 RAG</a:t>
-            </a:r>
-            <a:endParaRPr lang="en-US" sz="1050" dirty="0"/>
-          </a:p>
-        </p:txBody>
-      </p:sp>
-      <p:sp>
-        <p:nvSpPr>
-          <p:cNvPr id="10" name="Text 7"/>
-          <p:cNvSpPr/>
-          <p:nvPr/>
-        </p:nvSpPr>
-        <p:spPr>
-          <a:xfrm>
-            <a:off x="10817352" y="6373368"/>
-            <a:ext cx="822960" cy="256032"/>
-          </a:xfrm>
-          <a:prstGeom prst="rect">
-            <a:avLst/>
-          </a:prstGeom>
-          <a:noFill/>
-          <a:ln/>
-        </p:spPr>
-        <p:txBody>
-          <a:bodyPr wrap="square" lIns="0" tIns="0" rIns="0" bIns="0" rtlCol="0" anchor="t"/>
-          <a:lstStyle/>
-          <a:p>
-            <a:pPr marL="0" indent="0" algn="r">
-              <a:buNone/>
-            </a:pPr>
-            <a:r>
-              <a:rPr lang="en-US" sz="1200" dirty="0">
-                <a:solidFill>
-                  <a:srgbClr val="B9CBB9"/>
-                </a:solidFill>
-                <a:latin typeface="Calibri" pitchFamily="34" charset="0"/>
-                <a:ea typeface="Calibri" pitchFamily="34" charset="-122"/>
-                <a:cs typeface="Calibri" pitchFamily="34" charset="-120"/>
-              </a:rPr>
-              <a:t>22 / 22</a:t>
-            </a:r>
-            <a:endParaRPr lang="en-US" sz="1200" dirty="0"/>
+          <p:cNvPr id="16" name="TextBox 15">
+            <a:extLst>
+              <a:ext uri="{FF2B5EF4-FFF2-40B4-BE49-F238E27FC236}">
+                <a16:creationId xmlns:a16="http://schemas.microsoft.com/office/drawing/2014/main" id="{5C72738D-787E-DF2D-B335-DD182751F21C}"/>
+              </a:ext>
+            </a:extLst>
+          </p:cNvPr>
+          <p:cNvSpPr txBox="1"/>
+          <p:nvPr/>
+        </p:nvSpPr>
+        <p:spPr>
+          <a:xfrm>
+            <a:off x="2869576" y="5816025"/>
+            <a:ext cx="6553736" cy="584775"/>
+          </a:xfrm>
+          <a:prstGeom prst="rect">
+            <a:avLst/>
+          </a:prstGeom>
+          <a:noFill/>
+        </p:spPr>
+        <p:txBody>
+          <a:bodyPr wrap="square">
+            <a:spAutoFit/>
+          </a:bodyPr>
+          <a:lstStyle/>
+          <a:p>
+            <a:r>
+              <a:rPr lang="en-ZA" sz="3200" dirty="0">
+                <a:solidFill>
+                  <a:schemeClr val="bg2"/>
+                </a:solidFill>
+              </a:rPr>
+              <a:t>http://aka.ms/Spring-AI-for-Beginners</a:t>
+            </a:r>
           </a:p>
         </p:txBody>
       </p:sp>
@@ -12683,45 +12071,6 @@
           </a:prstGeom>
         </p:spPr>
       </p:pic>
-      <p:sp>
-        <p:nvSpPr>
-          <p:cNvPr id="7" name="Text 4"/>
-          <p:cNvSpPr/>
-          <p:nvPr/>
-        </p:nvSpPr>
-        <p:spPr>
-          <a:xfrm>
-            <a:off x="548640" y="5815584"/>
-            <a:ext cx="11064240" cy="448056"/>
-          </a:xfrm>
-          <a:prstGeom prst="rect">
-            <a:avLst/>
-          </a:prstGeom>
-          <a:noFill/>
-          <a:ln/>
-        </p:spPr>
-        <p:txBody>
-          <a:bodyPr wrap="square" lIns="0" tIns="0" rIns="0" bIns="0" rtlCol="0" anchor="t"/>
-          <a:lstStyle/>
-          <a:p>
-            <a:pPr marL="0" indent="0">
-              <a:buNone/>
-            </a:pPr>
-            <a:r>
-              <a:rPr lang="en-US" sz="1800" b="1" dirty="0">
-                <a:solidFill>
-                  <a:srgbClr val="397C25"/>
-                </a:solidFill>
-                <a:latin typeface="Calibri" pitchFamily="34" charset="0"/>
-                <a:ea typeface="Calibri" pitchFamily="34" charset="-122"/>
-                <a:cs typeface="Calibri" pitchFamily="34" charset="-120"/>
-              </a:rPr>
-              <a:t>Existing answer excerpt: compare each claim with the returned source passage.</a:t>
-            </a:r>
-            <a:endParaRPr lang="en-US" sz="1800" dirty="0"/>
-          </a:p>
-        </p:txBody>
-      </p:sp>
     </p:spTree>
   </p:cSld>
   <p:clrMapOvr>
@@ -13369,45 +12718,6 @@
           </a:p>
         </p:txBody>
       </p:sp>
-      <p:sp>
-        <p:nvSpPr>
-          <p:cNvPr id="18" name="Text 16"/>
-          <p:cNvSpPr/>
-          <p:nvPr/>
-        </p:nvSpPr>
-        <p:spPr>
-          <a:xfrm>
-            <a:off x="548640" y="5815584"/>
-            <a:ext cx="11064240" cy="448056"/>
-          </a:xfrm>
-          <a:prstGeom prst="rect">
-            <a:avLst/>
-          </a:prstGeom>
-          <a:noFill/>
-          <a:ln/>
-        </p:spPr>
-        <p:txBody>
-          <a:bodyPr wrap="square" lIns="0" tIns="0" rIns="0" bIns="0" rtlCol="0" anchor="t"/>
-          <a:lstStyle/>
-          <a:p>
-            <a:pPr marL="0" indent="0">
-              <a:buNone/>
-            </a:pPr>
-            <a:r>
-              <a:rPr lang="en-US" sz="1800" b="1" dirty="0">
-                <a:solidFill>
-                  <a:srgbClr val="397C25"/>
-                </a:solidFill>
-                <a:latin typeface="Calibri" pitchFamily="34" charset="0"/>
-                <a:ea typeface="Calibri" pitchFamily="34" charset="-122"/>
-                <a:cs typeface="Calibri" pitchFamily="34" charset="-120"/>
-              </a:rPr>
-              <a:t>Shared ETL: parse text/PDF -&gt; Document -&gt; TokenTextSplitter -&gt; VectorStore.add().</a:t>
-            </a:r>
-            <a:endParaRPr lang="en-US" sz="1800" dirty="0"/>
-          </a:p>
-        </p:txBody>
-      </p:sp>
     </p:spTree>
   </p:cSld>
   <p:clrMapOvr>
@@ -14104,45 +13414,6 @@
           </a:p>
         </p:txBody>
       </p:sp>
-      <p:sp>
-        <p:nvSpPr>
-          <p:cNvPr id="15" name="Text 13"/>
-          <p:cNvSpPr/>
-          <p:nvPr/>
-        </p:nvSpPr>
-        <p:spPr>
-          <a:xfrm>
-            <a:off x="548640" y="5815584"/>
-            <a:ext cx="11064240" cy="448056"/>
-          </a:xfrm>
-          <a:prstGeom prst="rect">
-            <a:avLst/>
-          </a:prstGeom>
-          <a:noFill/>
-          <a:ln/>
-        </p:spPr>
-        <p:txBody>
-          <a:bodyPr wrap="square" lIns="0" tIns="0" rIns="0" bIns="0" rtlCol="0" anchor="t"/>
-          <a:lstStyle/>
-          <a:p>
-            <a:pPr marL="0" indent="0">
-              <a:buNone/>
-            </a:pPr>
-            <a:r>
-              <a:rPr lang="en-US" sz="1800" b="1" dirty="0">
-                <a:solidFill>
-                  <a:srgbClr val="397C25"/>
-                </a:solidFill>
-                <a:latin typeface="Calibri" pitchFamily="34" charset="0"/>
-                <a:ea typeface="Calibri" pitchFamily="34" charset="-122"/>
-                <a:cs typeface="Calibri" pitchFamily="34" charset="-120"/>
-              </a:rPr>
-              <a:t>The Spring AI BOM manages the versions of these Spring AI artifacts.</a:t>
-            </a:r>
-            <a:endParaRPr lang="en-US" sz="1800" dirty="0"/>
-          </a:p>
-        </p:txBody>
-      </p:sp>
     </p:spTree>
   </p:cSld>
   <p:clrMapOvr>
@@ -14839,45 +14110,6 @@
           </a:p>
         </p:txBody>
       </p:sp>
-      <p:sp>
-        <p:nvSpPr>
-          <p:cNvPr id="15" name="Text 13"/>
-          <p:cNvSpPr/>
-          <p:nvPr/>
-        </p:nvSpPr>
-        <p:spPr>
-          <a:xfrm>
-            <a:off x="548640" y="5815584"/>
-            <a:ext cx="11064240" cy="448056"/>
-          </a:xfrm>
-          <a:prstGeom prst="rect">
-            <a:avLst/>
-          </a:prstGeom>
-          <a:noFill/>
-          <a:ln/>
-        </p:spPr>
-        <p:txBody>
-          <a:bodyPr wrap="square" lIns="0" tIns="0" rIns="0" bIns="0" rtlCol="0" anchor="t"/>
-          <a:lstStyle/>
-          <a:p>
-            <a:pPr marL="0" indent="0">
-              <a:buNone/>
-            </a:pPr>
-            <a:r>
-              <a:rPr lang="en-US" sz="1800" b="1" dirty="0">
-                <a:solidFill>
-                  <a:srgbClr val="397C25"/>
-                </a:solidFill>
-                <a:latin typeface="Calibri" pitchFamily="34" charset="0"/>
-                <a:ea typeface="Calibri" pitchFamily="34" charset="-122"/>
-                <a:cs typeface="Calibri" pitchFamily="34" charset="-120"/>
-              </a:rPr>
-              <a:t>Document carries both text and metadata through the Spring AI pipeline.</a:t>
-            </a:r>
-            <a:endParaRPr lang="en-US" sz="1800" dirty="0"/>
-          </a:p>
-        </p:txBody>
-      </p:sp>
     </p:spTree>
   </p:cSld>
   <p:clrMapOvr>
@@ -15091,45 +14323,6 @@
           </a:prstGeom>
         </p:spPr>
       </p:pic>
-      <p:sp>
-        <p:nvSpPr>
-          <p:cNvPr id="7" name="Text 4"/>
-          <p:cNvSpPr/>
-          <p:nvPr/>
-        </p:nvSpPr>
-        <p:spPr>
-          <a:xfrm>
-            <a:off x="548640" y="5815584"/>
-            <a:ext cx="11064240" cy="448056"/>
-          </a:xfrm>
-          <a:prstGeom prst="rect">
-            <a:avLst/>
-          </a:prstGeom>
-          <a:noFill/>
-          <a:ln/>
-        </p:spPr>
-        <p:txBody>
-          <a:bodyPr wrap="square" lIns="0" tIns="0" rIns="0" bIns="0" rtlCol="0" anchor="t"/>
-          <a:lstStyle/>
-          <a:p>
-            <a:pPr marL="0" indent="0">
-              <a:buNone/>
-            </a:pPr>
-            <a:r>
-              <a:rPr lang="en-US" sz="1800" b="1" dirty="0">
-                <a:solidFill>
-                  <a:srgbClr val="397C25"/>
-                </a:solidFill>
-                <a:latin typeface="Calibri" pitchFamily="34" charset="0"/>
-                <a:ea typeface="Calibri" pitchFamily="34" charset="-122"/>
-                <a:cs typeface="Calibri" pitchFamily="34" charset="-120"/>
-              </a:rPr>
-              <a:t>The image illustrates overlap; the workshop uses 150-token chunks without added overlap.</a:t>
-            </a:r>
-            <a:endParaRPr lang="en-US" sz="1800" dirty="0"/>
-          </a:p>
-        </p:txBody>
-      </p:sp>
     </p:spTree>
   </p:cSld>
   <p:clrMapOvr>
@@ -15806,45 +14999,6 @@
           </a:p>
         </p:txBody>
       </p:sp>
-      <p:sp>
-        <p:nvSpPr>
-          <p:cNvPr id="15" name="Text 13"/>
-          <p:cNvSpPr/>
-          <p:nvPr/>
-        </p:nvSpPr>
-        <p:spPr>
-          <a:xfrm>
-            <a:off x="548640" y="5815584"/>
-            <a:ext cx="11064240" cy="448056"/>
-          </a:xfrm>
-          <a:prstGeom prst="rect">
-            <a:avLst/>
-          </a:prstGeom>
-          <a:noFill/>
-          <a:ln/>
-        </p:spPr>
-        <p:txBody>
-          <a:bodyPr wrap="square" lIns="0" tIns="0" rIns="0" bIns="0" rtlCol="0" anchor="t"/>
-          <a:lstStyle/>
-          <a:p>
-            <a:pPr marL="0" indent="0">
-              <a:buNone/>
-            </a:pPr>
-            <a:r>
-              <a:rPr lang="en-US" sz="1800" b="1" dirty="0">
-                <a:solidFill>
-                  <a:srgbClr val="397C25"/>
-                </a:solidFill>
-                <a:latin typeface="Calibri" pitchFamily="34" charset="0"/>
-                <a:ea typeface="Calibri" pitchFamily="34" charset="-122"/>
-                <a:cs typeface="Calibri" pitchFamily="34" charset="-120"/>
-              </a:rPr>
-              <a:t>The 150-token setting is local to this workshop, not Spring AI's global default.</a:t>
-            </a:r>
-            <a:endParaRPr lang="en-US" sz="1800" dirty="0"/>
-          </a:p>
-        </p:txBody>
-      </p:sp>
     </p:spTree>
   </p:cSld>
   <p:clrMapOvr>
@@ -16058,45 +15212,6 @@
           </a:prstGeom>
         </p:spPr>
       </p:pic>
-      <p:sp>
-        <p:nvSpPr>
-          <p:cNvPr id="7" name="Text 4"/>
-          <p:cNvSpPr/>
-          <p:nvPr/>
-        </p:nvSpPr>
-        <p:spPr>
-          <a:xfrm>
-            <a:off x="548640" y="5815584"/>
-            <a:ext cx="11064240" cy="448056"/>
-          </a:xfrm>
-          <a:prstGeom prst="rect">
-            <a:avLst/>
-          </a:prstGeom>
-          <a:noFill/>
-          <a:ln/>
-        </p:spPr>
-        <p:txBody>
-          <a:bodyPr wrap="square" lIns="0" tIns="0" rIns="0" bIns="0" rtlCol="0" anchor="t"/>
-          <a:lstStyle/>
-          <a:p>
-            <a:pPr marL="0" indent="0">
-              <a:buNone/>
-            </a:pPr>
-            <a:r>
-              <a:rPr lang="en-US" sz="1800" b="1" dirty="0">
-                <a:solidFill>
-                  <a:srgbClr val="397C25"/>
-                </a:solidFill>
-                <a:latin typeface="Calibri" pitchFamily="34" charset="0"/>
-                <a:ea typeface="Calibri" pitchFamily="34" charset="-122"/>
-                <a:cs typeface="Calibri" pitchFamily="34" charset="-120"/>
-              </a:rPr>
-              <a:t>An embedding represents similarity; it is not a generated answer. These three-coordinate vectors are illustrative.</a:t>
-            </a:r>
-            <a:endParaRPr lang="en-US" sz="1800" dirty="0"/>
-          </a:p>
-        </p:txBody>
-      </p:sp>
     </p:spTree>
   </p:cSld>
   <p:clrMapOvr>
